--- a/lecons/F5/27_F5_M2_L24_Multipurpose_River_Development_Project_MRDP.pptx
+++ b/lecons/F5/27_F5_M2_L24_Multipurpose_River_Development_Project_MRDP.pptx
@@ -13332,7 +13332,7 @@
               <a:buNone/>
             </a:pPr>
             <a:r>
-              <a:rPr lang="en-US" sz="4000" b="1" dirty="0">
+              <a:rPr lang="en-US" sz="3200" b="1" dirty="0">
                 <a:solidFill>
                   <a:srgbClr val="111111"/>
                 </a:solidFill>
@@ -13342,7 +13342,7 @@
               </a:rPr>
               <a:t>Topic: Development Projects and Environmental Management</a:t>
             </a:r>
-            <a:endParaRPr lang="en-US" sz="4000" dirty="0"/>
+            <a:endParaRPr lang="en-US" sz="3200" dirty="0"/>
           </a:p>
           <a:p>
             <a:pPr algn="l" indent="0" marL="0">
@@ -13352,7 +13352,7 @@
               <a:buNone/>
             </a:pPr>
             <a:r>
-              <a:rPr lang="en-US" sz="4000" b="1" dirty="0">
+              <a:rPr lang="en-US" sz="3200" b="1" dirty="0">
                 <a:solidFill>
                   <a:srgbClr val="111111"/>
                 </a:solidFill>
@@ -13362,7 +13362,7 @@
               </a:rPr>
               <a:t>Sub-topic: Development Projects</a:t>
             </a:r>
-            <a:endParaRPr lang="en-US" sz="4000" dirty="0"/>
+            <a:endParaRPr lang="en-US" sz="3200" dirty="0"/>
           </a:p>
           <a:p>
             <a:pPr algn="l" indent="0" marL="0">
@@ -13372,7 +13372,7 @@
               <a:buNone/>
             </a:pPr>
             <a:r>
-              <a:rPr lang="en-US" sz="4000" b="1" dirty="0">
+              <a:rPr lang="en-US" sz="3200" b="1" dirty="0">
                 <a:solidFill>
                   <a:srgbClr val="990011"/>
                 </a:solidFill>
@@ -13382,7 +13382,7 @@
               </a:rPr>
               <a:t>Lesson 24: Multipurpose River Development Project (MRDP)</a:t>
             </a:r>
-            <a:endParaRPr lang="en-US" sz="4000" dirty="0"/>
+            <a:endParaRPr lang="en-US" sz="3200" dirty="0"/>
           </a:p>
         </p:txBody>
       </p:sp>

--- a/lecons/F5/27_F5_M2_L24_Multipurpose_River_Development_Project_MRDP.pptx
+++ b/lecons/F5/27_F5_M2_L24_Multipurpose_River_Development_Project_MRDP.pptx
@@ -57,9 +57,11 @@
     <p:sldId id="305" r:id="rId51"/>
     <p:sldId id="306" r:id="rId52"/>
     <p:sldId id="307" r:id="rId53"/>
+    <p:sldId id="308" r:id="rId54"/>
+    <p:sldId id="309" r:id="rId55"/>
   </p:sldIdLst>
   <p:notesMasterIdLst>
-    <p:notesMasterId r:id="rId54"/>
+    <p:notesMasterId r:id="rId56"/>
   </p:notesMasterIdLst>
   <p:sldSz cx="12192000" cy="6858000"/>
   <p:notesSz cx="6858000" cy="12192000"/>
@@ -3369,7 +3371,7 @@
           <a:p>
             <a:r>
               <a:rPr lang="en-US" dirty="0"/>
-              <a:t>Let us copy Case Study: The Three Gorges Dam in China. The Three Gorges project on the Yangtze River shows the following. On this slide we have Achievements and More achievements. Write each point on a new line, with the key term first, and explain it in your own words when we revise. When you finish, we go to the next slide.</a:t>
+              <a:t>Let us copy Achievements. The Three Gorges project on the Yangtze River has the following achievements. On this slide we have Electricity and Flood control. Write each point on a new line, with the key term first, and explain it in your own words when we revise. When you finish, we go to the next slide.</a:t>
             </a:r>
             <a:endParaRPr lang="en-US" dirty="0"/>
           </a:p>
@@ -3545,7 +3547,7 @@
           <a:p>
             <a:r>
               <a:rPr lang="en-US" dirty="0"/>
-              <a:t>We continue with Case Study: The Three Gorges Dam in China. On this slide we have Problems and Solutions. Write each point on a new line, with the key term first, and explain it in your own words when we revise.</a:t>
+              <a:t>We continue with Achievements. On this slide we have Navigation. Write each point on a new line, with the key term first, and explain it in your own words when we revise.</a:t>
             </a:r>
             <a:endParaRPr lang="en-US" dirty="0"/>
           </a:p>
@@ -3633,7 +3635,7 @@
           <a:p>
             <a:r>
               <a:rPr lang="en-US" dirty="0"/>
-              <a:t>Now let us check what you have understood. Question 1: Define an MRDP. Answer in your exercise book.</a:t>
+              <a:t>Let us copy Problems and Solutions. The project has the following problems and solutions. On this slide we have Displacement of people. Write each point on a new line, with the key term first, and explain it in your own words when we revise. When you finish, we go to the next slide.</a:t>
             </a:r>
             <a:endParaRPr lang="en-US" dirty="0"/>
           </a:p>
@@ -3721,7 +3723,7 @@
           <a:p>
             <a:r>
               <a:rPr lang="en-US" dirty="0"/>
-              <a:t>The expected answer is: the development of a river basin with dams for several uses. If you got it right, well done.</a:t>
+              <a:t>We continue with Problems and Solutions. On this slide we have Silting. Write each point on a new line, with the key term first, and explain it in your own words when we revise.</a:t>
             </a:r>
             <a:endParaRPr lang="en-US" dirty="0"/>
           </a:p>
@@ -3809,7 +3811,7 @@
           <a:p>
             <a:r>
               <a:rPr lang="en-US" dirty="0"/>
-              <a:t>Now let us check what you have understood. Question 2: Give two achievements and one problem of the Three Gorges Dam. Answer in your exercise book.</a:t>
+              <a:t>Now let us check what you have understood. Question 1: Define an MRDP. Answer in your exercise book.</a:t>
             </a:r>
             <a:endParaRPr lang="en-US" dirty="0"/>
           </a:p>
@@ -3897,7 +3899,7 @@
           <a:p>
             <a:r>
               <a:rPr lang="en-US" dirty="0"/>
-              <a:t>The expected answer is: electricity and flood control; displacement of people. If you got it right, well done.</a:t>
+              <a:t>The expected answer is: the development of a river basin with dams for several uses. If you got it right, well done.</a:t>
             </a:r>
             <a:endParaRPr lang="en-US" dirty="0"/>
           </a:p>
@@ -3985,7 +3987,7 @@
           <a:p>
             <a:r>
               <a:rPr lang="en-US" dirty="0"/>
-              <a:t>For those who need more practice, fill in the blanks in your exercise book. The answers are: number 1, hydro-electricity; number 2, Yangtze; number 3, reservoir.</a:t>
+              <a:t>Now let us check what you have understood. Question 2: Give two achievements and one problem of the Three Gorges Dam. Answer in your exercise book.</a:t>
             </a:r>
             <a:endParaRPr lang="en-US" dirty="0"/>
           </a:p>
@@ -4073,7 +4075,7 @@
           <a:p>
             <a:r>
               <a:rPr lang="en-US" dirty="0"/>
-              <a:t>For your homework: Draw a diagram showing the uses of a multipurpose dam. We shall correct it at the beginning of our next lesson.</a:t>
+              <a:t>The expected answer is: electricity and flood control; displacement of people. If you got it right, well done.</a:t>
             </a:r>
             <a:endParaRPr lang="en-US" dirty="0"/>
           </a:p>
@@ -4161,7 +4163,7 @@
           <a:p>
             <a:r>
               <a:rPr lang="en-US" dirty="0"/>
-              <a:t>Our next lesson will be on Lesson 25: Multipurpose River Development Project in Cameroon. Thank you for your attention, and see you next time.</a:t>
+              <a:t>For those who need more practice, fill in the blanks in your exercise book. The answers are: number 1, hydro-electricity; number 2, Yangtze; number 3, reservoir.</a:t>
             </a:r>
             <a:endParaRPr lang="en-US" dirty="0"/>
           </a:p>
@@ -4249,7 +4251,7 @@
           <a:p>
             <a:r>
               <a:rPr lang="en-US" dirty="0"/>
-              <a:t>Let us play the bilingual game. I say a word in English, and you give me the French word. Then we do the reverse.</a:t>
+              <a:t>For your homework: Draw a diagram showing the uses of a multipurpose dam. We shall correct it at the beginning of our next lesson.</a:t>
             </a:r>
             <a:endParaRPr lang="en-US" dirty="0"/>
           </a:p>
@@ -4337,7 +4339,7 @@
           <a:p>
             <a:r>
               <a:rPr lang="en-US" dirty="0"/>
-              <a:t>I record this information in the official logbook of the class after the lesson.</a:t>
+              <a:t>Our next lesson will be on Lesson 25: Multipurpose River Development Project in Cameroon. Thank you for your attention, and see you next time.</a:t>
             </a:r>
             <a:endParaRPr lang="en-US" dirty="0"/>
           </a:p>
@@ -4513,7 +4515,7 @@
           <a:p>
             <a:r>
               <a:rPr lang="en-US" dirty="0"/>
-              <a:t>I complete the second page of the logbook: the matter taught, the evaluation, the homework and the attendance.</a:t>
+              <a:t>Let us play the bilingual game. I say a word in English, and you give me the French word. Then we do the reverse.</a:t>
             </a:r>
             <a:endParaRPr lang="en-US" dirty="0"/>
           </a:p>
@@ -4601,7 +4603,7 @@
           <a:p>
             <a:r>
               <a:rPr lang="en-US" dirty="0"/>
-              <a:t>This slide is for me, the teacher: it gives the timing of the lesson and what to do if the projector is not available.</a:t>
+              <a:t>I record this information in the official logbook of the class after the lesson.</a:t>
             </a:r>
             <a:endParaRPr lang="en-US" dirty="0"/>
           </a:p>
@@ -4689,7 +4691,7 @@
           <a:p>
             <a:r>
               <a:rPr lang="en-US" dirty="0"/>
-              <a:t>These are the references and picture credits used to prepare this lesson.</a:t>
+              <a:t>I complete the second page of the logbook: the matter taught, the evaluation, the homework and the attendance.</a:t>
             </a:r>
             <a:endParaRPr lang="en-US" dirty="0"/>
           </a:p>
@@ -4713,6 +4715,182 @@
             <a:fld id="{F7021451-1387-4CA6-816F-3879F97B5CBC}" type="slidenum">
               <a:rPr lang="en-US"/>
               <a:t>52</a:t>
+            </a:fld>
+            <a:endParaRPr lang="en-US"/>
+          </a:p>
+        </p:txBody>
+      </p:sp>
+    </p:spTree>
+    <p:extLst>
+      <p:ext uri="{BB962C8B-B14F-4D97-AF65-F5344CB8AC3E}">
+        <p14:creationId xmlns:p14="http://schemas.microsoft.com/office/powerpoint/2010/main" val="1024086991"/>
+      </p:ext>
+    </p:extLst>
+  </p:cSld>
+  <p:clrMapOvr>
+    <a:masterClrMapping/>
+  </p:clrMapOvr>
+</p:notes>
+</file>
+
+<file path=ppt/notesSlides/notesSlide53.xml><?xml version="1.0" encoding="utf-8"?>
+<p:notes xmlns:a="http://schemas.openxmlformats.org/drawingml/2006/main" xmlns:r="http://schemas.openxmlformats.org/officeDocument/2006/relationships" xmlns:p="http://schemas.openxmlformats.org/presentationml/2006/main">
+  <p:cSld>
+    <p:spTree>
+      <p:nvGrpSpPr>
+        <p:cNvPr id="1" name=""/>
+        <p:cNvGrpSpPr/>
+        <p:nvPr/>
+      </p:nvGrpSpPr>
+      <p:grpSpPr>
+        <a:xfrm>
+          <a:off x="0" y="0"/>
+          <a:ext cx="0" cy="0"/>
+          <a:chOff x="0" y="0"/>
+          <a:chExt cx="0" cy="0"/>
+        </a:xfrm>
+      </p:grpSpPr>
+      <p:sp>
+        <p:nvSpPr>
+          <p:cNvPr id="2" name="Slide Image Placeholder 1"/>
+          <p:cNvSpPr>
+            <a:spLocks noGrp="1" noRot="1" noChangeAspect="1"/>
+          </p:cNvSpPr>
+          <p:nvPr>
+            <p:ph type="sldImg"/>
+          </p:nvPr>
+        </p:nvSpPr>
+        <p:spPr/>
+      </p:sp>
+      <p:sp>
+        <p:nvSpPr>
+          <p:cNvPr id="3" name="Notes Placeholder 2"/>
+          <p:cNvSpPr>
+            <a:spLocks noGrp="1"/>
+          </p:cNvSpPr>
+          <p:nvPr>
+            <p:ph type="body" idx="1"/>
+          </p:nvPr>
+        </p:nvSpPr>
+        <p:spPr/>
+        <p:txBody>
+          <a:bodyPr/>
+          <a:lstStyle/>
+          <a:p>
+            <a:r>
+              <a:rPr lang="en-US" dirty="0"/>
+              <a:t>This slide is for me, the teacher: it gives the timing of the lesson and what to do if the projector is not available.</a:t>
+            </a:r>
+            <a:endParaRPr lang="en-US" dirty="0"/>
+          </a:p>
+        </p:txBody>
+      </p:sp>
+      <p:sp>
+        <p:nvSpPr>
+          <p:cNvPr id="4" name="Slide Number Placeholder 3"/>
+          <p:cNvSpPr>
+            <a:spLocks noGrp="1"/>
+          </p:cNvSpPr>
+          <p:nvPr>
+            <p:ph type="sldNum" sz="quarter" idx="10"/>
+          </p:nvPr>
+        </p:nvSpPr>
+        <p:spPr/>
+        <p:txBody>
+          <a:bodyPr/>
+          <a:lstStyle/>
+          <a:p>
+            <a:fld id="{F7021451-1387-4CA6-816F-3879F97B5CBC}" type="slidenum">
+              <a:rPr lang="en-US"/>
+              <a:t>53</a:t>
+            </a:fld>
+            <a:endParaRPr lang="en-US"/>
+          </a:p>
+        </p:txBody>
+      </p:sp>
+    </p:spTree>
+    <p:extLst>
+      <p:ext uri="{BB962C8B-B14F-4D97-AF65-F5344CB8AC3E}">
+        <p14:creationId xmlns:p14="http://schemas.microsoft.com/office/powerpoint/2010/main" val="1024086991"/>
+      </p:ext>
+    </p:extLst>
+  </p:cSld>
+  <p:clrMapOvr>
+    <a:masterClrMapping/>
+  </p:clrMapOvr>
+</p:notes>
+</file>
+
+<file path=ppt/notesSlides/notesSlide54.xml><?xml version="1.0" encoding="utf-8"?>
+<p:notes xmlns:a="http://schemas.openxmlformats.org/drawingml/2006/main" xmlns:r="http://schemas.openxmlformats.org/officeDocument/2006/relationships" xmlns:p="http://schemas.openxmlformats.org/presentationml/2006/main">
+  <p:cSld>
+    <p:spTree>
+      <p:nvGrpSpPr>
+        <p:cNvPr id="1" name=""/>
+        <p:cNvGrpSpPr/>
+        <p:nvPr/>
+      </p:nvGrpSpPr>
+      <p:grpSpPr>
+        <a:xfrm>
+          <a:off x="0" y="0"/>
+          <a:ext cx="0" cy="0"/>
+          <a:chOff x="0" y="0"/>
+          <a:chExt cx="0" cy="0"/>
+        </a:xfrm>
+      </p:grpSpPr>
+      <p:sp>
+        <p:nvSpPr>
+          <p:cNvPr id="2" name="Slide Image Placeholder 1"/>
+          <p:cNvSpPr>
+            <a:spLocks noGrp="1" noRot="1" noChangeAspect="1"/>
+          </p:cNvSpPr>
+          <p:nvPr>
+            <p:ph type="sldImg"/>
+          </p:nvPr>
+        </p:nvSpPr>
+        <p:spPr/>
+      </p:sp>
+      <p:sp>
+        <p:nvSpPr>
+          <p:cNvPr id="3" name="Notes Placeholder 2"/>
+          <p:cNvSpPr>
+            <a:spLocks noGrp="1"/>
+          </p:cNvSpPr>
+          <p:nvPr>
+            <p:ph type="body" idx="1"/>
+          </p:nvPr>
+        </p:nvSpPr>
+        <p:spPr/>
+        <p:txBody>
+          <a:bodyPr/>
+          <a:lstStyle/>
+          <a:p>
+            <a:r>
+              <a:rPr lang="en-US" dirty="0"/>
+              <a:t>These are the references and picture credits used to prepare this lesson.</a:t>
+            </a:r>
+            <a:endParaRPr lang="en-US" dirty="0"/>
+          </a:p>
+        </p:txBody>
+      </p:sp>
+      <p:sp>
+        <p:nvSpPr>
+          <p:cNvPr id="4" name="Slide Number Placeholder 3"/>
+          <p:cNvSpPr>
+            <a:spLocks noGrp="1"/>
+          </p:cNvSpPr>
+          <p:nvPr>
+            <p:ph type="sldNum" sz="quarter" idx="10"/>
+          </p:nvPr>
+        </p:nvSpPr>
+        <p:spPr/>
+        <p:txBody>
+          <a:bodyPr/>
+          <a:lstStyle/>
+          <a:p>
+            <a:fld id="{F7021451-1387-4CA6-816F-3879F97B5CBC}" type="slidenum">
+              <a:rPr lang="en-US"/>
+              <a:t>54</a:t>
             </a:fld>
             <a:endParaRPr lang="en-US"/>
           </a:p>
@@ -14514,7 +14692,7 @@
         <p:spPr>
           <a:xfrm>
             <a:off x="0" y="658368"/>
-            <a:ext cx="3840480" cy="5833872"/>
+            <a:ext cx="2468880" cy="5833872"/>
           </a:xfrm>
           <a:prstGeom prst="rect">
             <a:avLst/>
@@ -14529,8 +14707,8 @@
         </p:nvSpPr>
         <p:spPr>
           <a:xfrm>
-            <a:off x="4069080" y="1005840"/>
-            <a:ext cx="7802575" cy="731520"/>
+            <a:off x="2697480" y="1005840"/>
+            <a:ext cx="9174175" cy="731520"/>
           </a:xfrm>
           <a:prstGeom prst="rect">
             <a:avLst/>
@@ -14570,8 +14748,47 @@
         </p:nvSpPr>
         <p:spPr>
           <a:xfrm>
-            <a:off x="4069080" y="1783080"/>
-            <a:ext cx="7802575" cy="4663440"/>
+            <a:off x="2697480" y="1737360"/>
+            <a:ext cx="9174175" cy="457200"/>
+          </a:xfrm>
+          <a:prstGeom prst="rect">
+            <a:avLst/>
+          </a:prstGeom>
+          <a:noFill/>
+          <a:ln/>
+        </p:spPr>
+        <p:txBody>
+          <a:bodyPr wrap="square" lIns="0" tIns="0" rIns="0" bIns="0" rtlCol="0" anchor="ctr"/>
+          <a:lstStyle/>
+          <a:p>
+            <a:pPr algn="l" indent="0" marL="0">
+              <a:buNone/>
+            </a:pPr>
+            <a:r>
+              <a:rPr lang="en-US" sz="3200" b="1" dirty="0">
+                <a:solidFill>
+                  <a:srgbClr val="990011"/>
+                </a:solidFill>
+                <a:latin typeface="Times New Roman" pitchFamily="34" charset="0"/>
+                <a:ea typeface="Times New Roman" pitchFamily="34" charset="-122"/>
+                <a:cs typeface="Times New Roman" pitchFamily="34" charset="-120"/>
+              </a:rPr>
+              <a:t>A) Achievements</a:t>
+            </a:r>
+            <a:endParaRPr lang="en-US" sz="3200" dirty="0"/>
+          </a:p>
+        </p:txBody>
+      </p:sp>
+      <p:sp>
+        <p:nvSpPr>
+          <p:cNvPr id="6" name="Text 3"/>
+          <p:cNvSpPr/>
+          <p:nvPr/>
+        </p:nvSpPr>
+        <p:spPr>
+          <a:xfrm>
+            <a:off x="2697480" y="2240280"/>
+            <a:ext cx="9174175" cy="4206240"/>
           </a:xfrm>
           <a:prstGeom prst="rect">
             <a:avLst/>
@@ -14598,7 +14815,7 @@
                 <a:ea typeface="Times New Roman" pitchFamily="34" charset="-122"/>
                 <a:cs typeface="Times New Roman" pitchFamily="34" charset="-120"/>
               </a:rPr>
-              <a:t>The Three Gorges project on the Yangtze River shows the following:</a:t>
+              <a:t>The Three Gorges project on the Yangtze River has the following achievements:</a:t>
             </a:r>
             <a:endParaRPr lang="en-US" sz="4000" dirty="0"/>
           </a:p>
@@ -14618,7 +14835,7 @@
                 <a:ea typeface="Times New Roman" pitchFamily="34" charset="-122"/>
                 <a:cs typeface="Times New Roman" pitchFamily="34" charset="-120"/>
               </a:rPr>
-              <a:t>Achievements: </a:t>
+              <a:t>Electricity: </a:t>
             </a:r>
             <a:pPr algn="l" indent="0" marL="0">
               <a:spcAft>
@@ -14635,7 +14852,7 @@
                 <a:ea typeface="Times New Roman" pitchFamily="34" charset="-122"/>
                 <a:cs typeface="Times New Roman" pitchFamily="34" charset="-120"/>
               </a:rPr>
-              <a:t>It is the largest power station in the world and it controls floods.</a:t>
+              <a:t>It is the largest power station in the world.</a:t>
             </a:r>
             <a:endParaRPr lang="en-US" sz="4000" dirty="0"/>
           </a:p>
@@ -14655,7 +14872,7 @@
                 <a:ea typeface="Times New Roman" pitchFamily="34" charset="-122"/>
                 <a:cs typeface="Times New Roman" pitchFamily="34" charset="-120"/>
               </a:rPr>
-              <a:t>More achievements: </a:t>
+              <a:t>Flood control: </a:t>
             </a:r>
             <a:pPr algn="l" indent="0" marL="0">
               <a:spcAft>
@@ -14672,7 +14889,7 @@
                 <a:ea typeface="Times New Roman" pitchFamily="34" charset="-122"/>
                 <a:cs typeface="Times New Roman" pitchFamily="34" charset="-120"/>
               </a:rPr>
-              <a:t>Large ships can now sail upstream to Chongqing.</a:t>
+              <a:t>It protects the valley from floods.</a:t>
             </a:r>
             <a:endParaRPr lang="en-US" sz="4000" dirty="0"/>
           </a:p>
@@ -15088,7 +15305,7 @@
                 <a:ea typeface="Times New Roman" pitchFamily="34" charset="-122"/>
                 <a:cs typeface="Times New Roman" pitchFamily="34" charset="-120"/>
               </a:rPr>
-              <a:t>2. Case Study: The Three Gorges Dam in China (continued)</a:t>
+              <a:t>2. Case Study: The Three Gorges Dam in China</a:t>
             </a:r>
             <a:endParaRPr lang="en-US" sz="3600" dirty="0"/>
           </a:p>
@@ -15102,8 +15319,47 @@
         </p:nvSpPr>
         <p:spPr>
           <a:xfrm>
-            <a:off x="5349240" y="1783080"/>
-            <a:ext cx="6522415" cy="4663440"/>
+            <a:off x="5349240" y="1737360"/>
+            <a:ext cx="6522415" cy="457200"/>
+          </a:xfrm>
+          <a:prstGeom prst="rect">
+            <a:avLst/>
+          </a:prstGeom>
+          <a:noFill/>
+          <a:ln/>
+        </p:spPr>
+        <p:txBody>
+          <a:bodyPr wrap="square" lIns="0" tIns="0" rIns="0" bIns="0" rtlCol="0" anchor="ctr"/>
+          <a:lstStyle/>
+          <a:p>
+            <a:pPr algn="l" indent="0" marL="0">
+              <a:buNone/>
+            </a:pPr>
+            <a:r>
+              <a:rPr lang="en-US" sz="3200" b="1" dirty="0">
+                <a:solidFill>
+                  <a:srgbClr val="990011"/>
+                </a:solidFill>
+                <a:latin typeface="Times New Roman" pitchFamily="34" charset="0"/>
+                <a:ea typeface="Times New Roman" pitchFamily="34" charset="-122"/>
+                <a:cs typeface="Times New Roman" pitchFamily="34" charset="-120"/>
+              </a:rPr>
+              <a:t>A) Achievements (continued)</a:t>
+            </a:r>
+            <a:endParaRPr lang="en-US" sz="3200" dirty="0"/>
+          </a:p>
+        </p:txBody>
+      </p:sp>
+      <p:sp>
+        <p:nvSpPr>
+          <p:cNvPr id="6" name="Text 3"/>
+          <p:cNvSpPr/>
+          <p:nvPr/>
+        </p:nvSpPr>
+        <p:spPr>
+          <a:xfrm>
+            <a:off x="5349240" y="2240280"/>
+            <a:ext cx="6522415" cy="4206240"/>
           </a:xfrm>
           <a:prstGeom prst="rect">
             <a:avLst/>
@@ -15130,7 +15386,7 @@
                 <a:ea typeface="Times New Roman" pitchFamily="34" charset="-122"/>
                 <a:cs typeface="Times New Roman" pitchFamily="34" charset="-120"/>
               </a:rPr>
-              <a:t>Problems: </a:t>
+              <a:t>Navigation: </a:t>
             </a:r>
             <a:pPr algn="l" indent="0" marL="0">
               <a:spcAft>
@@ -15147,44 +15403,7 @@
                 <a:ea typeface="Times New Roman" pitchFamily="34" charset="-122"/>
                 <a:cs typeface="Times New Roman" pitchFamily="34" charset="-120"/>
               </a:rPr>
-              <a:t>More than one million people were moved and the reservoir is silting.</a:t>
-            </a:r>
-            <a:endParaRPr lang="en-US" sz="4000" dirty="0"/>
-          </a:p>
-          <a:p>
-            <a:pPr algn="l" indent="0" marL="0">
-              <a:spcAft>
-                <a:spcPts val="800"/>
-              </a:spcAft>
-              <a:buNone/>
-            </a:pPr>
-            <a:r>
-              <a:rPr lang="en-US" sz="4000" b="1" dirty="0">
-                <a:solidFill>
-                  <a:srgbClr val="111111"/>
-                </a:solidFill>
-                <a:latin typeface="Times New Roman" pitchFamily="34" charset="0"/>
-                <a:ea typeface="Times New Roman" pitchFamily="34" charset="-122"/>
-                <a:cs typeface="Times New Roman" pitchFamily="34" charset="-120"/>
-              </a:rPr>
-              <a:t>Solutions: </a:t>
-            </a:r>
-            <a:pPr algn="l" indent="0" marL="0">
-              <a:spcAft>
-                <a:spcPts val="800"/>
-              </a:spcAft>
-              <a:buNone/>
-            </a:pPr>
-            <a:r>
-              <a:rPr lang="en-US" sz="4000" dirty="0">
-                <a:solidFill>
-                  <a:srgbClr val="111111"/>
-                </a:solidFill>
-                <a:latin typeface="Times New Roman" pitchFamily="34" charset="0"/>
-                <a:ea typeface="Times New Roman" pitchFamily="34" charset="-122"/>
-                <a:cs typeface="Times New Roman" pitchFamily="34" charset="-120"/>
-              </a:rPr>
-              <a:t>Displaced people were resettled and trees are planted to reduce erosion.</a:t>
+              <a:t>Large ships can now sail upstream to Chongqing.</a:t>
             </a:r>
             <a:endParaRPr lang="en-US" sz="4000" dirty="0"/>
           </a:p>
@@ -15296,7 +15515,7 @@
                 <a:ea typeface="Calibri" pitchFamily="34" charset="-122"/>
                 <a:cs typeface="Calibri" pitchFamily="34" charset="-120"/>
               </a:rPr>
-              <a:t>FORMATIVE EVALUATION</a:t>
+              <a:t>BOARD SUMMARY</a:t>
             </a:r>
             <a:endParaRPr lang="en-US" sz="1400" dirty="0"/>
           </a:p>
@@ -15319,7 +15538,7 @@
         <p:spPr>
           <a:xfrm>
             <a:off x="0" y="658368"/>
-            <a:ext cx="5120640" cy="5833872"/>
+            <a:ext cx="3840480" cy="5833872"/>
           </a:xfrm>
           <a:prstGeom prst="rect">
             <a:avLst/>
@@ -15334,8 +15553,8 @@
         </p:nvSpPr>
         <p:spPr>
           <a:xfrm>
-            <a:off x="5349240" y="1005840"/>
-            <a:ext cx="6522415" cy="731520"/>
+            <a:off x="4069080" y="1005840"/>
+            <a:ext cx="7802575" cy="731520"/>
           </a:xfrm>
           <a:prstGeom prst="rect">
             <a:avLst/>
@@ -15361,7 +15580,7 @@
                 <a:ea typeface="Times New Roman" pitchFamily="34" charset="-122"/>
                 <a:cs typeface="Times New Roman" pitchFamily="34" charset="-120"/>
               </a:rPr>
-              <a:t>Evaluation 1</a:t>
+              <a:t>2. Case Study: The Three Gorges Dam in China</a:t>
             </a:r>
             <a:endParaRPr lang="en-US" sz="3600" dirty="0"/>
           </a:p>
@@ -15375,8 +15594,47 @@
         </p:nvSpPr>
         <p:spPr>
           <a:xfrm>
-            <a:off x="5349240" y="1783080"/>
-            <a:ext cx="6522415" cy="4663440"/>
+            <a:off x="4069080" y="1737360"/>
+            <a:ext cx="7802575" cy="457200"/>
+          </a:xfrm>
+          <a:prstGeom prst="rect">
+            <a:avLst/>
+          </a:prstGeom>
+          <a:noFill/>
+          <a:ln/>
+        </p:spPr>
+        <p:txBody>
+          <a:bodyPr wrap="square" lIns="0" tIns="0" rIns="0" bIns="0" rtlCol="0" anchor="ctr"/>
+          <a:lstStyle/>
+          <a:p>
+            <a:pPr algn="l" indent="0" marL="0">
+              <a:buNone/>
+            </a:pPr>
+            <a:r>
+              <a:rPr lang="en-US" sz="3200" b="1" dirty="0">
+                <a:solidFill>
+                  <a:srgbClr val="990011"/>
+                </a:solidFill>
+                <a:latin typeface="Times New Roman" pitchFamily="34" charset="0"/>
+                <a:ea typeface="Times New Roman" pitchFamily="34" charset="-122"/>
+                <a:cs typeface="Times New Roman" pitchFamily="34" charset="-120"/>
+              </a:rPr>
+              <a:t>B) Problems and Solutions</a:t>
+            </a:r>
+            <a:endParaRPr lang="en-US" sz="3200" dirty="0"/>
+          </a:p>
+        </p:txBody>
+      </p:sp>
+      <p:sp>
+        <p:nvSpPr>
+          <p:cNvPr id="6" name="Text 3"/>
+          <p:cNvSpPr/>
+          <p:nvPr/>
+        </p:nvSpPr>
+        <p:spPr>
+          <a:xfrm>
+            <a:off x="4069080" y="2240280"/>
+            <a:ext cx="7802575" cy="4206240"/>
           </a:xfrm>
           <a:prstGeom prst="rect">
             <a:avLst/>
@@ -15395,7 +15653,7 @@
               <a:buNone/>
             </a:pPr>
             <a:r>
-              <a:rPr lang="en-US" sz="4000" dirty="0">
+              <a:rPr lang="en-US" sz="4000" i="1" dirty="0">
                 <a:solidFill>
                   <a:srgbClr val="111111"/>
                 </a:solidFill>
@@ -15403,7 +15661,44 @@
                 <a:ea typeface="Times New Roman" pitchFamily="34" charset="-122"/>
                 <a:cs typeface="Times New Roman" pitchFamily="34" charset="-120"/>
               </a:rPr>
-              <a:t>Define an MRDP.</a:t>
+              <a:t>The project has the following problems and solutions:</a:t>
+            </a:r>
+            <a:endParaRPr lang="en-US" sz="4000" dirty="0"/>
+          </a:p>
+          <a:p>
+            <a:pPr algn="l" indent="0" marL="0">
+              <a:spcAft>
+                <a:spcPts val="800"/>
+              </a:spcAft>
+              <a:buNone/>
+            </a:pPr>
+            <a:r>
+              <a:rPr lang="en-US" sz="4000" b="1" dirty="0">
+                <a:solidFill>
+                  <a:srgbClr val="111111"/>
+                </a:solidFill>
+                <a:latin typeface="Times New Roman" pitchFamily="34" charset="0"/>
+                <a:ea typeface="Times New Roman" pitchFamily="34" charset="-122"/>
+                <a:cs typeface="Times New Roman" pitchFamily="34" charset="-120"/>
+              </a:rPr>
+              <a:t>Displacement of people: </a:t>
+            </a:r>
+            <a:pPr algn="l" indent="0" marL="0">
+              <a:spcAft>
+                <a:spcPts val="800"/>
+              </a:spcAft>
+              <a:buNone/>
+            </a:pPr>
+            <a:r>
+              <a:rPr lang="en-US" sz="4000" dirty="0">
+                <a:solidFill>
+                  <a:srgbClr val="111111"/>
+                </a:solidFill>
+                <a:latin typeface="Times New Roman" pitchFamily="34" charset="0"/>
+                <a:ea typeface="Times New Roman" pitchFamily="34" charset="-122"/>
+                <a:cs typeface="Times New Roman" pitchFamily="34" charset="-120"/>
+              </a:rPr>
+              <a:t>More than one million people were moved, so they were resettled in new towns.</a:t>
             </a:r>
             <a:endParaRPr lang="en-US" sz="4000" dirty="0"/>
           </a:p>
@@ -15515,7 +15810,7 @@
                 <a:ea typeface="Calibri" pitchFamily="34" charset="-122"/>
                 <a:cs typeface="Calibri" pitchFamily="34" charset="-120"/>
               </a:rPr>
-              <a:t>FORMATIVE EVALUATION</a:t>
+              <a:t>BOARD SUMMARY</a:t>
             </a:r>
             <a:endParaRPr lang="en-US" sz="1400" dirty="0"/>
           </a:p>
@@ -15580,7 +15875,7 @@
                 <a:ea typeface="Times New Roman" pitchFamily="34" charset="-122"/>
                 <a:cs typeface="Times New Roman" pitchFamily="34" charset="-120"/>
               </a:rPr>
-              <a:t>Expected Answer</a:t>
+              <a:t>2. Case Study: The Three Gorges Dam in China</a:t>
             </a:r>
             <a:endParaRPr lang="en-US" sz="3600" dirty="0"/>
           </a:p>
@@ -15594,8 +15889,47 @@
         </p:nvSpPr>
         <p:spPr>
           <a:xfrm>
-            <a:off x="5349240" y="1783080"/>
-            <a:ext cx="6522415" cy="4663440"/>
+            <a:off x="5349240" y="1737360"/>
+            <a:ext cx="6522415" cy="457200"/>
+          </a:xfrm>
+          <a:prstGeom prst="rect">
+            <a:avLst/>
+          </a:prstGeom>
+          <a:noFill/>
+          <a:ln/>
+        </p:spPr>
+        <p:txBody>
+          <a:bodyPr wrap="square" lIns="0" tIns="0" rIns="0" bIns="0" rtlCol="0" anchor="ctr"/>
+          <a:lstStyle/>
+          <a:p>
+            <a:pPr algn="l" indent="0" marL="0">
+              <a:buNone/>
+            </a:pPr>
+            <a:r>
+              <a:rPr lang="en-US" sz="2700" b="1" dirty="0">
+                <a:solidFill>
+                  <a:srgbClr val="990011"/>
+                </a:solidFill>
+                <a:latin typeface="Times New Roman" pitchFamily="34" charset="0"/>
+                <a:ea typeface="Times New Roman" pitchFamily="34" charset="-122"/>
+                <a:cs typeface="Times New Roman" pitchFamily="34" charset="-120"/>
+              </a:rPr>
+              <a:t>B) Problems and Solutions (continued)</a:t>
+            </a:r>
+            <a:endParaRPr lang="en-US" sz="2700" dirty="0"/>
+          </a:p>
+        </p:txBody>
+      </p:sp>
+      <p:sp>
+        <p:nvSpPr>
+          <p:cNvPr id="6" name="Text 3"/>
+          <p:cNvSpPr/>
+          <p:nvPr/>
+        </p:nvSpPr>
+        <p:spPr>
+          <a:xfrm>
+            <a:off x="5349240" y="2240280"/>
+            <a:ext cx="6522415" cy="4206240"/>
           </a:xfrm>
           <a:prstGeom prst="rect">
             <a:avLst/>
@@ -15614,7 +15948,7 @@
               <a:buNone/>
             </a:pPr>
             <a:r>
-              <a:rPr lang="en-US" sz="4000" dirty="0">
+              <a:rPr lang="en-US" sz="4000" b="1" dirty="0">
                 <a:solidFill>
                   <a:srgbClr val="111111"/>
                 </a:solidFill>
@@ -15622,7 +15956,24 @@
                 <a:ea typeface="Times New Roman" pitchFamily="34" charset="-122"/>
                 <a:cs typeface="Times New Roman" pitchFamily="34" charset="-120"/>
               </a:rPr>
-              <a:t>The development of a river basin with dams for several uses.</a:t>
+              <a:t>Silting: </a:t>
+            </a:r>
+            <a:pPr algn="l" indent="0" marL="0">
+              <a:spcAft>
+                <a:spcPts val="800"/>
+              </a:spcAft>
+              <a:buNone/>
+            </a:pPr>
+            <a:r>
+              <a:rPr lang="en-US" sz="4000" dirty="0">
+                <a:solidFill>
+                  <a:srgbClr val="111111"/>
+                </a:solidFill>
+                <a:latin typeface="Times New Roman" pitchFamily="34" charset="0"/>
+                <a:ea typeface="Times New Roman" pitchFamily="34" charset="-122"/>
+                <a:cs typeface="Times New Roman" pitchFamily="34" charset="-120"/>
+              </a:rPr>
+              <a:t>The reservoir fills with mud, so trees are planted to reduce erosion.</a:t>
             </a:r>
             <a:endParaRPr lang="en-US" sz="4000" dirty="0"/>
           </a:p>
@@ -15799,7 +16150,7 @@
                 <a:ea typeface="Times New Roman" pitchFamily="34" charset="-122"/>
                 <a:cs typeface="Times New Roman" pitchFamily="34" charset="-120"/>
               </a:rPr>
-              <a:t>Evaluation 2</a:t>
+              <a:t>Evaluation 1</a:t>
             </a:r>
             <a:endParaRPr lang="en-US" sz="3600" dirty="0"/>
           </a:p>
@@ -15841,7 +16192,7 @@
                 <a:ea typeface="Times New Roman" pitchFamily="34" charset="-122"/>
                 <a:cs typeface="Times New Roman" pitchFamily="34" charset="-120"/>
               </a:rPr>
-              <a:t>Give two achievements and one problem of the Three Gorges Dam.</a:t>
+              <a:t>Define an MRDP.</a:t>
             </a:r>
             <a:endParaRPr lang="en-US" sz="4000" dirty="0"/>
           </a:p>
@@ -16060,7 +16411,7 @@
                 <a:ea typeface="Times New Roman" pitchFamily="34" charset="-122"/>
                 <a:cs typeface="Times New Roman" pitchFamily="34" charset="-120"/>
               </a:rPr>
-              <a:t>Electricity and flood control; displacement of people.</a:t>
+              <a:t>The development of a river basin with dams for several uses.</a:t>
             </a:r>
             <a:endParaRPr lang="en-US" sz="4000" dirty="0"/>
           </a:p>
@@ -16172,7 +16523,7 @@
                 <a:ea typeface="Calibri" pitchFamily="34" charset="-122"/>
                 <a:cs typeface="Calibri" pitchFamily="34" charset="-120"/>
               </a:rPr>
-              <a:t>REMEDIATION</a:t>
+              <a:t>FORMATIVE EVALUATION</a:t>
             </a:r>
             <a:endParaRPr lang="en-US" sz="1400" dirty="0"/>
           </a:p>
@@ -16195,7 +16546,7 @@
         <p:spPr>
           <a:xfrm>
             <a:off x="0" y="658368"/>
-            <a:ext cx="3840480" cy="5833872"/>
+            <a:ext cx="5120640" cy="5833872"/>
           </a:xfrm>
           <a:prstGeom prst="rect">
             <a:avLst/>
@@ -16210,8 +16561,8 @@
         </p:nvSpPr>
         <p:spPr>
           <a:xfrm>
-            <a:off x="4069080" y="1005840"/>
-            <a:ext cx="7802575" cy="731520"/>
+            <a:off x="5349240" y="1005840"/>
+            <a:ext cx="6522415" cy="731520"/>
           </a:xfrm>
           <a:prstGeom prst="rect">
             <a:avLst/>
@@ -16237,7 +16588,7 @@
                 <a:ea typeface="Times New Roman" pitchFamily="34" charset="-122"/>
                 <a:cs typeface="Times New Roman" pitchFamily="34" charset="-120"/>
               </a:rPr>
-              <a:t>Remediation</a:t>
+              <a:t>Evaluation 2</a:t>
             </a:r>
             <a:endParaRPr lang="en-US" sz="3600" dirty="0"/>
           </a:p>
@@ -16251,8 +16602,8 @@
         </p:nvSpPr>
         <p:spPr>
           <a:xfrm>
-            <a:off x="4069080" y="1783080"/>
-            <a:ext cx="7802575" cy="4663440"/>
+            <a:off x="5349240" y="1783080"/>
+            <a:ext cx="6522415" cy="4663440"/>
           </a:xfrm>
           <a:prstGeom prst="rect">
             <a:avLst/>
@@ -16271,7 +16622,7 @@
               <a:buNone/>
             </a:pPr>
             <a:r>
-              <a:rPr lang="en-US" sz="4000" b="1" dirty="0">
+              <a:rPr lang="en-US" sz="4000" dirty="0">
                 <a:solidFill>
                   <a:srgbClr val="111111"/>
                 </a:solidFill>
@@ -16279,73 +16630,7 @@
                 <a:ea typeface="Times New Roman" pitchFamily="34" charset="-122"/>
                 <a:cs typeface="Times New Roman" pitchFamily="34" charset="-120"/>
               </a:rPr>
-              <a:t>Fill in the blanks:</a:t>
-            </a:r>
-            <a:endParaRPr lang="en-US" sz="4000" dirty="0"/>
-          </a:p>
-          <a:p>
-            <a:pPr algn="l" marL="342900" indent="-342900">
-              <a:spcAft>
-                <a:spcPts val="800"/>
-              </a:spcAft>
-              <a:buSzPct val="100000"/>
-              <a:buFont typeface="+mj-lt"/>
-              <a:buAutoNum type="arabicPeriod" startAt="1"/>
-            </a:pPr>
-            <a:r>
-              <a:rPr lang="en-US" sz="4000" dirty="0">
-                <a:solidFill>
-                  <a:srgbClr val="111111"/>
-                </a:solidFill>
-                <a:latin typeface="Times New Roman" pitchFamily="34" charset="0"/>
-                <a:ea typeface="Times New Roman" pitchFamily="34" charset="-122"/>
-                <a:cs typeface="Times New Roman" pitchFamily="34" charset="-120"/>
-              </a:rPr>
-              <a:t>Electricity from falling water is ______.</a:t>
-            </a:r>
-            <a:endParaRPr lang="en-US" sz="4000" dirty="0"/>
-          </a:p>
-          <a:p>
-            <a:pPr algn="l" marL="342900" indent="-342900">
-              <a:spcAft>
-                <a:spcPts val="800"/>
-              </a:spcAft>
-              <a:buSzPct val="100000"/>
-              <a:buFont typeface="+mj-lt"/>
-              <a:buAutoNum type="arabicPeriod" startAt="1"/>
-            </a:pPr>
-            <a:r>
-              <a:rPr lang="en-US" sz="4000" dirty="0">
-                <a:solidFill>
-                  <a:srgbClr val="111111"/>
-                </a:solidFill>
-                <a:latin typeface="Times New Roman" pitchFamily="34" charset="0"/>
-                <a:ea typeface="Times New Roman" pitchFamily="34" charset="-122"/>
-                <a:cs typeface="Times New Roman" pitchFamily="34" charset="-120"/>
-              </a:rPr>
-              <a:t>The Three Gorges Dam is on the ______ River.</a:t>
-            </a:r>
-            <a:endParaRPr lang="en-US" sz="4000" dirty="0"/>
-          </a:p>
-          <a:p>
-            <a:pPr algn="l" marL="342900" indent="-342900">
-              <a:spcAft>
-                <a:spcPts val="800"/>
-              </a:spcAft>
-              <a:buSzPct val="100000"/>
-              <a:buFont typeface="+mj-lt"/>
-              <a:buAutoNum type="arabicPeriod" startAt="1"/>
-            </a:pPr>
-            <a:r>
-              <a:rPr lang="en-US" sz="4000" dirty="0">
-                <a:solidFill>
-                  <a:srgbClr val="111111"/>
-                </a:solidFill>
-                <a:latin typeface="Times New Roman" pitchFamily="34" charset="0"/>
-                <a:ea typeface="Times New Roman" pitchFamily="34" charset="-122"/>
-                <a:cs typeface="Times New Roman" pitchFamily="34" charset="-120"/>
-              </a:rPr>
-              <a:t>A lake behind a dam is a ______.</a:t>
+              <a:t>Give two achievements and one problem of the Three Gorges Dam.</a:t>
             </a:r>
             <a:endParaRPr lang="en-US" sz="4000" dirty="0"/>
           </a:p>
@@ -16457,7 +16742,7 @@
                 <a:ea typeface="Calibri" pitchFamily="34" charset="-122"/>
                 <a:cs typeface="Calibri" pitchFamily="34" charset="-120"/>
               </a:rPr>
-              <a:t>HOMEWORK</a:t>
+              <a:t>FORMATIVE EVALUATION</a:t>
             </a:r>
             <a:endParaRPr lang="en-US" sz="1400" dirty="0"/>
           </a:p>
@@ -16522,7 +16807,7 @@
                 <a:ea typeface="Times New Roman" pitchFamily="34" charset="-122"/>
                 <a:cs typeface="Times New Roman" pitchFamily="34" charset="-120"/>
               </a:rPr>
-              <a:t>Homework</a:t>
+              <a:t>Expected Answer</a:t>
             </a:r>
             <a:endParaRPr lang="en-US" sz="3600" dirty="0"/>
           </a:p>
@@ -16564,7 +16849,7 @@
                 <a:ea typeface="Times New Roman" pitchFamily="34" charset="-122"/>
                 <a:cs typeface="Times New Roman" pitchFamily="34" charset="-120"/>
               </a:rPr>
-              <a:t>Draw a diagram showing the uses of a multipurpose dam.</a:t>
+              <a:t>Electricity and flood control; displacement of people.</a:t>
             </a:r>
             <a:endParaRPr lang="en-US" sz="4000" dirty="0"/>
           </a:p>
@@ -16676,7 +16961,7 @@
                 <a:ea typeface="Calibri" pitchFamily="34" charset="-122"/>
                 <a:cs typeface="Calibri" pitchFamily="34" charset="-120"/>
               </a:rPr>
-              <a:t>NEXT LESSON</a:t>
+              <a:t>REMEDIATION</a:t>
             </a:r>
             <a:endParaRPr lang="en-US" sz="1400" dirty="0"/>
           </a:p>
@@ -16699,7 +16984,7 @@
         <p:spPr>
           <a:xfrm>
             <a:off x="0" y="658368"/>
-            <a:ext cx="5120640" cy="5833872"/>
+            <a:ext cx="3840480" cy="5833872"/>
           </a:xfrm>
           <a:prstGeom prst="rect">
             <a:avLst/>
@@ -16714,8 +16999,8 @@
         </p:nvSpPr>
         <p:spPr>
           <a:xfrm>
-            <a:off x="5349240" y="1005840"/>
-            <a:ext cx="6522415" cy="731520"/>
+            <a:off x="4069080" y="1005840"/>
+            <a:ext cx="7802575" cy="731520"/>
           </a:xfrm>
           <a:prstGeom prst="rect">
             <a:avLst/>
@@ -16741,7 +17026,7 @@
                 <a:ea typeface="Times New Roman" pitchFamily="34" charset="-122"/>
                 <a:cs typeface="Times New Roman" pitchFamily="34" charset="-120"/>
               </a:rPr>
-              <a:t>Next Lesson</a:t>
+              <a:t>Remediation</a:t>
             </a:r>
             <a:endParaRPr lang="en-US" sz="3600" dirty="0"/>
           </a:p>
@@ -16755,8 +17040,8 @@
         </p:nvSpPr>
         <p:spPr>
           <a:xfrm>
-            <a:off x="5349240" y="1783080"/>
-            <a:ext cx="6522415" cy="4663440"/>
+            <a:off x="4069080" y="1783080"/>
+            <a:ext cx="7802575" cy="4663440"/>
           </a:xfrm>
           <a:prstGeom prst="rect">
             <a:avLst/>
@@ -16765,10 +17050,10 @@
           <a:ln/>
         </p:spPr>
         <p:txBody>
-          <a:bodyPr wrap="square" lIns="0" tIns="0" rIns="0" bIns="0" rtlCol="0" anchor="ctr"/>
-          <a:lstStyle/>
-          <a:p>
-            <a:pPr algn="ctr" indent="0" marL="0">
+          <a:bodyPr wrap="square" lIns="0" tIns="0" rIns="0" bIns="0" rtlCol="0" anchor="t"/>
+          <a:lstStyle/>
+          <a:p>
+            <a:pPr algn="l" indent="0" marL="0">
               <a:spcAft>
                 <a:spcPts val="800"/>
               </a:spcAft>
@@ -16783,27 +17068,73 @@
                 <a:ea typeface="Times New Roman" pitchFamily="34" charset="-122"/>
                 <a:cs typeface="Times New Roman" pitchFamily="34" charset="-120"/>
               </a:rPr>
-              <a:t>Our next lesson will be on:</a:t>
+              <a:t>Fill in the blanks:</a:t>
             </a:r>
             <a:endParaRPr lang="en-US" sz="4000" dirty="0"/>
           </a:p>
           <a:p>
-            <a:pPr algn="ctr" indent="0" marL="0">
+            <a:pPr algn="l" marL="342900" indent="-342900">
               <a:spcAft>
                 <a:spcPts val="800"/>
               </a:spcAft>
-              <a:buNone/>
+              <a:buSzPct val="100000"/>
+              <a:buFont typeface="+mj-lt"/>
+              <a:buAutoNum type="arabicPeriod" startAt="1"/>
             </a:pPr>
             <a:r>
-              <a:rPr lang="en-US" sz="4000" b="1" dirty="0">
-                <a:solidFill>
-                  <a:srgbClr val="990011"/>
+              <a:rPr lang="en-US" sz="4000" dirty="0">
+                <a:solidFill>
+                  <a:srgbClr val="111111"/>
                 </a:solidFill>
                 <a:latin typeface="Times New Roman" pitchFamily="34" charset="0"/>
                 <a:ea typeface="Times New Roman" pitchFamily="34" charset="-122"/>
                 <a:cs typeface="Times New Roman" pitchFamily="34" charset="-120"/>
               </a:rPr>
-              <a:t>Lesson 25: Multipurpose River Development Project in Cameroon</a:t>
+              <a:t>Electricity from falling water is ______.</a:t>
+            </a:r>
+            <a:endParaRPr lang="en-US" sz="4000" dirty="0"/>
+          </a:p>
+          <a:p>
+            <a:pPr algn="l" marL="342900" indent="-342900">
+              <a:spcAft>
+                <a:spcPts val="800"/>
+              </a:spcAft>
+              <a:buSzPct val="100000"/>
+              <a:buFont typeface="+mj-lt"/>
+              <a:buAutoNum type="arabicPeriod" startAt="1"/>
+            </a:pPr>
+            <a:r>
+              <a:rPr lang="en-US" sz="4000" dirty="0">
+                <a:solidFill>
+                  <a:srgbClr val="111111"/>
+                </a:solidFill>
+                <a:latin typeface="Times New Roman" pitchFamily="34" charset="0"/>
+                <a:ea typeface="Times New Roman" pitchFamily="34" charset="-122"/>
+                <a:cs typeface="Times New Roman" pitchFamily="34" charset="-120"/>
+              </a:rPr>
+              <a:t>The Three Gorges Dam is on the ______ River.</a:t>
+            </a:r>
+            <a:endParaRPr lang="en-US" sz="4000" dirty="0"/>
+          </a:p>
+          <a:p>
+            <a:pPr algn="l" marL="342900" indent="-342900">
+              <a:spcAft>
+                <a:spcPts val="800"/>
+              </a:spcAft>
+              <a:buSzPct val="100000"/>
+              <a:buFont typeface="+mj-lt"/>
+              <a:buAutoNum type="arabicPeriod" startAt="1"/>
+            </a:pPr>
+            <a:r>
+              <a:rPr lang="en-US" sz="4000" dirty="0">
+                <a:solidFill>
+                  <a:srgbClr val="111111"/>
+                </a:solidFill>
+                <a:latin typeface="Times New Roman" pitchFamily="34" charset="0"/>
+                <a:ea typeface="Times New Roman" pitchFamily="34" charset="-122"/>
+                <a:cs typeface="Times New Roman" pitchFamily="34" charset="-120"/>
+              </a:rPr>
+              <a:t>A lake behind a dam is a ______.</a:t>
             </a:r>
             <a:endParaRPr lang="en-US" sz="4000" dirty="0"/>
           </a:p>
@@ -16915,6 +17246,683 @@
                 <a:ea typeface="Calibri" pitchFamily="34" charset="-122"/>
                 <a:cs typeface="Calibri" pitchFamily="34" charset="-120"/>
               </a:rPr>
+              <a:t>HOMEWORK</a:t>
+            </a:r>
+            <a:endParaRPr lang="en-US" sz="1400" dirty="0"/>
+          </a:p>
+        </p:txBody>
+      </p:sp>
+      <p:pic>
+        <p:nvPicPr>
+          <p:cNvPr id="3" name="Image 0" descr="/home/claude/f4/img/minesec_sheet.png">    </p:cNvPr>
+          <p:cNvPicPr>
+            <a:picLocks noChangeAspect="1"/>
+          </p:cNvPicPr>
+          <p:nvPr/>
+        </p:nvPicPr>
+        <p:blipFill>
+          <a:blip r:embed="rId1"/>
+          <a:stretch>
+            <a:fillRect/>
+          </a:stretch>
+        </p:blipFill>
+        <p:spPr>
+          <a:xfrm>
+            <a:off x="0" y="658368"/>
+            <a:ext cx="5120640" cy="5833872"/>
+          </a:xfrm>
+          <a:prstGeom prst="rect">
+            <a:avLst/>
+          </a:prstGeom>
+        </p:spPr>
+      </p:pic>
+      <p:sp>
+        <p:nvSpPr>
+          <p:cNvPr id="4" name="Text 1"/>
+          <p:cNvSpPr/>
+          <p:nvPr/>
+        </p:nvSpPr>
+        <p:spPr>
+          <a:xfrm>
+            <a:off x="5349240" y="1005840"/>
+            <a:ext cx="6522415" cy="731520"/>
+          </a:xfrm>
+          <a:prstGeom prst="rect">
+            <a:avLst/>
+          </a:prstGeom>
+          <a:noFill/>
+          <a:ln/>
+        </p:spPr>
+        <p:txBody>
+          <a:bodyPr wrap="square" lIns="0" tIns="0" rIns="0" bIns="0" rtlCol="0" anchor="ctr">
+            <a:normAutofit/>
+          </a:bodyPr>
+          <a:lstStyle/>
+          <a:p>
+            <a:pPr algn="ctr" indent="0" marL="0">
+              <a:buNone/>
+            </a:pPr>
+            <a:r>
+              <a:rPr lang="en-US" sz="3600" b="1" dirty="0">
+                <a:solidFill>
+                  <a:srgbClr val="990011"/>
+                </a:solidFill>
+                <a:latin typeface="Times New Roman" pitchFamily="34" charset="0"/>
+                <a:ea typeface="Times New Roman" pitchFamily="34" charset="-122"/>
+                <a:cs typeface="Times New Roman" pitchFamily="34" charset="-120"/>
+              </a:rPr>
+              <a:t>Homework</a:t>
+            </a:r>
+            <a:endParaRPr lang="en-US" sz="3600" dirty="0"/>
+          </a:p>
+        </p:txBody>
+      </p:sp>
+      <p:sp>
+        <p:nvSpPr>
+          <p:cNvPr id="5" name="Text 2"/>
+          <p:cNvSpPr/>
+          <p:nvPr/>
+        </p:nvSpPr>
+        <p:spPr>
+          <a:xfrm>
+            <a:off x="5349240" y="1783080"/>
+            <a:ext cx="6522415" cy="4663440"/>
+          </a:xfrm>
+          <a:prstGeom prst="rect">
+            <a:avLst/>
+          </a:prstGeom>
+          <a:noFill/>
+          <a:ln/>
+        </p:spPr>
+        <p:txBody>
+          <a:bodyPr wrap="square" lIns="0" tIns="0" rIns="0" bIns="0" rtlCol="0" anchor="t"/>
+          <a:lstStyle/>
+          <a:p>
+            <a:pPr algn="l" indent="0" marL="0">
+              <a:spcAft>
+                <a:spcPts val="800"/>
+              </a:spcAft>
+              <a:buNone/>
+            </a:pPr>
+            <a:r>
+              <a:rPr lang="en-US" sz="4000" dirty="0">
+                <a:solidFill>
+                  <a:srgbClr val="111111"/>
+                </a:solidFill>
+                <a:latin typeface="Times New Roman" pitchFamily="34" charset="0"/>
+                <a:ea typeface="Times New Roman" pitchFamily="34" charset="-122"/>
+                <a:cs typeface="Times New Roman" pitchFamily="34" charset="-120"/>
+              </a:rPr>
+              <a:t>Draw a diagram showing the uses of a multipurpose dam.</a:t>
+            </a:r>
+            <a:endParaRPr lang="en-US" sz="4000" dirty="0"/>
+          </a:p>
+        </p:txBody>
+      </p:sp>
+      <p:sp>
+        <p:nvSpPr>
+          <p:cNvPr id="25" name="Slide Number Placeholder 0"/>
+          <p:cNvSpPr>
+            <a:spLocks noGrp="1"/>
+          </p:cNvSpPr>
+          <p:nvPr>
+            <p:ph type="sldNum" sz="quarter" idx="4294967295"/>
+          </p:nvPr>
+        </p:nvSpPr>
+        <p:spPr>
+          <a:xfrm>
+            <a:off x="27432" y="91440"/>
+            <a:ext cx="585216" cy="475488"/>
+          </a:xfrm>
+          <a:prstGeom prst="rect">
+            <a:avLst/>
+          </a:prstGeom>
+          <a:extLst>
+            <a:ext uri="{C572A759-6A51-4108-AA02-DFA0A04FC94B}">
+              <ma14:wrappingTextBoxFlag xmlns:ma14="http://schemas.microsoft.com/office/mac/drawingml/2011/main" val="0"/>
+            </a:ext>
+          </a:extLst>
+        </p:spPr>
+        <p:txBody>
+          <a:bodyPr/>
+          <a:lstStyle>
+            <a:lvl1pPr>
+              <a:defRPr sz="2000">
+                <a:solidFill>
+                  <a:srgbClr val="FFFFFF"/>
+                </a:solidFill>
+                <a:latin typeface="Calibri"/>
+                <a:ea typeface="Calibri"/>
+                <a:cs typeface="Calibri"/>
+              </a:defRPr>
+            </a:lvl1pPr>
+          </a:lstStyle>
+          <a:p>
+            <a:pPr algn="ctr"/>
+            <a:fld id="{F7021451-1387-4CA6-816F-3879F97B5CBC}" type="slidenum">
+              <a:rPr b="1" lang="en-US"/>
+              <a:t>48</a:t>
+            </a:fld>
+            <a:endParaRPr lang="en-US"/>
+          </a:p>
+        </p:txBody>
+      </p:sp>
+    </p:spTree>
+  </p:cSld>
+  <p:clrMapOvr>
+    <a:masterClrMapping/>
+  </p:clrMapOvr>
+</p:sld>
+</file>
+
+<file path=ppt/slides/slide49.xml><?xml version="1.0" encoding="utf-8"?>
+<p:sld xmlns:a="http://schemas.openxmlformats.org/drawingml/2006/main" xmlns:r="http://schemas.openxmlformats.org/officeDocument/2006/relationships" xmlns:p="http://schemas.openxmlformats.org/presentationml/2006/main">
+  <p:cSld name="Slide 49">
+    <p:spTree>
+      <p:nvGrpSpPr>
+        <p:cNvPr id="1" name=""/>
+        <p:cNvGrpSpPr/>
+        <p:nvPr/>
+      </p:nvGrpSpPr>
+      <p:grpSpPr>
+        <a:xfrm>
+          <a:off x="0" y="0"/>
+          <a:ext cx="0" cy="0"/>
+          <a:chOff x="0" y="0"/>
+          <a:chExt cx="0" cy="0"/>
+        </a:xfrm>
+      </p:grpSpPr>
+      <p:sp>
+        <p:nvSpPr>
+          <p:cNvPr id="2" name="Text 0"/>
+          <p:cNvSpPr/>
+          <p:nvPr/>
+        </p:nvSpPr>
+        <p:spPr>
+          <a:xfrm>
+            <a:off x="457200" y="713232"/>
+            <a:ext cx="11368735" cy="274320"/>
+          </a:xfrm>
+          <a:prstGeom prst="rect">
+            <a:avLst/>
+          </a:prstGeom>
+          <a:noFill/>
+          <a:ln/>
+        </p:spPr>
+        <p:txBody>
+          <a:bodyPr wrap="square" lIns="0" tIns="0" rIns="0" bIns="0" rtlCol="0" anchor="ctr"/>
+          <a:lstStyle/>
+          <a:p>
+            <a:pPr algn="r" indent="0" marL="0">
+              <a:buNone/>
+            </a:pPr>
+            <a:r>
+              <a:rPr lang="en-US" sz="1400" b="1" dirty="0">
+                <a:solidFill>
+                  <a:srgbClr val="1C3F6E"/>
+                </a:solidFill>
+                <a:latin typeface="Calibri" pitchFamily="34" charset="0"/>
+                <a:ea typeface="Calibri" pitchFamily="34" charset="-122"/>
+                <a:cs typeface="Calibri" pitchFamily="34" charset="-120"/>
+              </a:rPr>
+              <a:t>NEXT LESSON</a:t>
+            </a:r>
+            <a:endParaRPr lang="en-US" sz="1400" dirty="0"/>
+          </a:p>
+        </p:txBody>
+      </p:sp>
+      <p:pic>
+        <p:nvPicPr>
+          <p:cNvPr id="3" name="Image 0" descr="/home/claude/f4/img/minesec_sheet.png">    </p:cNvPr>
+          <p:cNvPicPr>
+            <a:picLocks noChangeAspect="1"/>
+          </p:cNvPicPr>
+          <p:nvPr/>
+        </p:nvPicPr>
+        <p:blipFill>
+          <a:blip r:embed="rId1"/>
+          <a:stretch>
+            <a:fillRect/>
+          </a:stretch>
+        </p:blipFill>
+        <p:spPr>
+          <a:xfrm>
+            <a:off x="0" y="658368"/>
+            <a:ext cx="5120640" cy="5833872"/>
+          </a:xfrm>
+          <a:prstGeom prst="rect">
+            <a:avLst/>
+          </a:prstGeom>
+        </p:spPr>
+      </p:pic>
+      <p:sp>
+        <p:nvSpPr>
+          <p:cNvPr id="4" name="Text 1"/>
+          <p:cNvSpPr/>
+          <p:nvPr/>
+        </p:nvSpPr>
+        <p:spPr>
+          <a:xfrm>
+            <a:off x="5349240" y="1005840"/>
+            <a:ext cx="6522415" cy="731520"/>
+          </a:xfrm>
+          <a:prstGeom prst="rect">
+            <a:avLst/>
+          </a:prstGeom>
+          <a:noFill/>
+          <a:ln/>
+        </p:spPr>
+        <p:txBody>
+          <a:bodyPr wrap="square" lIns="0" tIns="0" rIns="0" bIns="0" rtlCol="0" anchor="ctr">
+            <a:normAutofit/>
+          </a:bodyPr>
+          <a:lstStyle/>
+          <a:p>
+            <a:pPr algn="ctr" indent="0" marL="0">
+              <a:buNone/>
+            </a:pPr>
+            <a:r>
+              <a:rPr lang="en-US" sz="3600" b="1" dirty="0">
+                <a:solidFill>
+                  <a:srgbClr val="990011"/>
+                </a:solidFill>
+                <a:latin typeface="Times New Roman" pitchFamily="34" charset="0"/>
+                <a:ea typeface="Times New Roman" pitchFamily="34" charset="-122"/>
+                <a:cs typeface="Times New Roman" pitchFamily="34" charset="-120"/>
+              </a:rPr>
+              <a:t>Next Lesson</a:t>
+            </a:r>
+            <a:endParaRPr lang="en-US" sz="3600" dirty="0"/>
+          </a:p>
+        </p:txBody>
+      </p:sp>
+      <p:sp>
+        <p:nvSpPr>
+          <p:cNvPr id="5" name="Text 2"/>
+          <p:cNvSpPr/>
+          <p:nvPr/>
+        </p:nvSpPr>
+        <p:spPr>
+          <a:xfrm>
+            <a:off x="5349240" y="1783080"/>
+            <a:ext cx="6522415" cy="4663440"/>
+          </a:xfrm>
+          <a:prstGeom prst="rect">
+            <a:avLst/>
+          </a:prstGeom>
+          <a:noFill/>
+          <a:ln/>
+        </p:spPr>
+        <p:txBody>
+          <a:bodyPr wrap="square" lIns="0" tIns="0" rIns="0" bIns="0" rtlCol="0" anchor="ctr"/>
+          <a:lstStyle/>
+          <a:p>
+            <a:pPr algn="ctr" indent="0" marL="0">
+              <a:spcAft>
+                <a:spcPts val="800"/>
+              </a:spcAft>
+              <a:buNone/>
+            </a:pPr>
+            <a:r>
+              <a:rPr lang="en-US" sz="4000" b="1" dirty="0">
+                <a:solidFill>
+                  <a:srgbClr val="111111"/>
+                </a:solidFill>
+                <a:latin typeface="Times New Roman" pitchFamily="34" charset="0"/>
+                <a:ea typeface="Times New Roman" pitchFamily="34" charset="-122"/>
+                <a:cs typeface="Times New Roman" pitchFamily="34" charset="-120"/>
+              </a:rPr>
+              <a:t>Our next lesson will be on:</a:t>
+            </a:r>
+            <a:endParaRPr lang="en-US" sz="4000" dirty="0"/>
+          </a:p>
+          <a:p>
+            <a:pPr algn="ctr" indent="0" marL="0">
+              <a:spcAft>
+                <a:spcPts val="800"/>
+              </a:spcAft>
+              <a:buNone/>
+            </a:pPr>
+            <a:r>
+              <a:rPr lang="en-US" sz="4000" b="1" dirty="0">
+                <a:solidFill>
+                  <a:srgbClr val="990011"/>
+                </a:solidFill>
+                <a:latin typeface="Times New Roman" pitchFamily="34" charset="0"/>
+                <a:ea typeface="Times New Roman" pitchFamily="34" charset="-122"/>
+                <a:cs typeface="Times New Roman" pitchFamily="34" charset="-120"/>
+              </a:rPr>
+              <a:t>Lesson 25: Multipurpose River Development Project in Cameroon</a:t>
+            </a:r>
+            <a:endParaRPr lang="en-US" sz="4000" dirty="0"/>
+          </a:p>
+        </p:txBody>
+      </p:sp>
+      <p:sp>
+        <p:nvSpPr>
+          <p:cNvPr id="25" name="Slide Number Placeholder 0"/>
+          <p:cNvSpPr>
+            <a:spLocks noGrp="1"/>
+          </p:cNvSpPr>
+          <p:nvPr>
+            <p:ph type="sldNum" sz="quarter" idx="4294967295"/>
+          </p:nvPr>
+        </p:nvSpPr>
+        <p:spPr>
+          <a:xfrm>
+            <a:off x="27432" y="91440"/>
+            <a:ext cx="585216" cy="475488"/>
+          </a:xfrm>
+          <a:prstGeom prst="rect">
+            <a:avLst/>
+          </a:prstGeom>
+          <a:extLst>
+            <a:ext uri="{C572A759-6A51-4108-AA02-DFA0A04FC94B}">
+              <ma14:wrappingTextBoxFlag xmlns:ma14="http://schemas.microsoft.com/office/mac/drawingml/2011/main" val="0"/>
+            </a:ext>
+          </a:extLst>
+        </p:spPr>
+        <p:txBody>
+          <a:bodyPr/>
+          <a:lstStyle>
+            <a:lvl1pPr>
+              <a:defRPr sz="2000">
+                <a:solidFill>
+                  <a:srgbClr val="FFFFFF"/>
+                </a:solidFill>
+                <a:latin typeface="Calibri"/>
+                <a:ea typeface="Calibri"/>
+                <a:cs typeface="Calibri"/>
+              </a:defRPr>
+            </a:lvl1pPr>
+          </a:lstStyle>
+          <a:p>
+            <a:pPr algn="ctr"/>
+            <a:fld id="{F7021451-1387-4CA6-816F-3879F97B5CBC}" type="slidenum">
+              <a:rPr b="1" lang="en-US"/>
+              <a:t>49</a:t>
+            </a:fld>
+            <a:endParaRPr lang="en-US"/>
+          </a:p>
+        </p:txBody>
+      </p:sp>
+    </p:spTree>
+  </p:cSld>
+  <p:clrMapOvr>
+    <a:masterClrMapping/>
+  </p:clrMapOvr>
+</p:sld>
+</file>
+
+<file path=ppt/slides/slide5.xml><?xml version="1.0" encoding="utf-8"?>
+<p:sld xmlns:a="http://schemas.openxmlformats.org/drawingml/2006/main" xmlns:r="http://schemas.openxmlformats.org/officeDocument/2006/relationships" xmlns:p="http://schemas.openxmlformats.org/presentationml/2006/main">
+  <p:cSld name="Slide 5">
+    <p:spTree>
+      <p:nvGrpSpPr>
+        <p:cNvPr id="1" name=""/>
+        <p:cNvGrpSpPr/>
+        <p:nvPr/>
+      </p:nvGrpSpPr>
+      <p:grpSpPr>
+        <a:xfrm>
+          <a:off x="0" y="0"/>
+          <a:ext cx="0" cy="0"/>
+          <a:chOff x="0" y="0"/>
+          <a:chExt cx="0" cy="0"/>
+        </a:xfrm>
+      </p:grpSpPr>
+      <p:sp>
+        <p:nvSpPr>
+          <p:cNvPr id="2" name="Text 0"/>
+          <p:cNvSpPr/>
+          <p:nvPr/>
+        </p:nvSpPr>
+        <p:spPr>
+          <a:xfrm>
+            <a:off x="457200" y="713232"/>
+            <a:ext cx="11368735" cy="274320"/>
+          </a:xfrm>
+          <a:prstGeom prst="rect">
+            <a:avLst/>
+          </a:prstGeom>
+          <a:noFill/>
+          <a:ln/>
+        </p:spPr>
+        <p:txBody>
+          <a:bodyPr wrap="square" lIns="0" tIns="0" rIns="0" bIns="0" rtlCol="0" anchor="ctr"/>
+          <a:lstStyle/>
+          <a:p>
+            <a:pPr algn="r" indent="0" marL="0">
+              <a:buNone/>
+            </a:pPr>
+            <a:r>
+              <a:rPr lang="en-US" sz="1400" b="1" dirty="0">
+                <a:solidFill>
+                  <a:srgbClr val="1C3F6E"/>
+                </a:solidFill>
+                <a:latin typeface="Calibri" pitchFamily="34" charset="0"/>
+                <a:ea typeface="Calibri" pitchFamily="34" charset="-122"/>
+                <a:cs typeface="Calibri" pitchFamily="34" charset="-120"/>
+              </a:rPr>
+              <a:t>HOMEWORK CORRECTION</a:t>
+            </a:r>
+            <a:endParaRPr lang="en-US" sz="1400" dirty="0"/>
+          </a:p>
+        </p:txBody>
+      </p:sp>
+      <p:pic>
+        <p:nvPicPr>
+          <p:cNvPr id="3" name="Image 0" descr="/home/claude/f4/img/minesec_sheet.png">    </p:cNvPr>
+          <p:cNvPicPr>
+            <a:picLocks noChangeAspect="1"/>
+          </p:cNvPicPr>
+          <p:nvPr/>
+        </p:nvPicPr>
+        <p:blipFill>
+          <a:blip r:embed="rId1"/>
+          <a:stretch>
+            <a:fillRect/>
+          </a:stretch>
+        </p:blipFill>
+        <p:spPr>
+          <a:xfrm>
+            <a:off x="0" y="658368"/>
+            <a:ext cx="5120640" cy="5833872"/>
+          </a:xfrm>
+          <a:prstGeom prst="rect">
+            <a:avLst/>
+          </a:prstGeom>
+        </p:spPr>
+      </p:pic>
+      <p:sp>
+        <p:nvSpPr>
+          <p:cNvPr id="4" name="Text 1"/>
+          <p:cNvSpPr/>
+          <p:nvPr/>
+        </p:nvSpPr>
+        <p:spPr>
+          <a:xfrm>
+            <a:off x="5349240" y="1005840"/>
+            <a:ext cx="6522415" cy="731520"/>
+          </a:xfrm>
+          <a:prstGeom prst="rect">
+            <a:avLst/>
+          </a:prstGeom>
+          <a:noFill/>
+          <a:ln/>
+        </p:spPr>
+        <p:txBody>
+          <a:bodyPr wrap="square" lIns="0" tIns="0" rIns="0" bIns="0" rtlCol="0" anchor="ctr">
+            <a:normAutofit/>
+          </a:bodyPr>
+          <a:lstStyle/>
+          <a:p>
+            <a:pPr algn="ctr" indent="0" marL="0">
+              <a:buNone/>
+            </a:pPr>
+            <a:r>
+              <a:rPr lang="en-US" sz="3600" b="1" dirty="0">
+                <a:solidFill>
+                  <a:srgbClr val="990011"/>
+                </a:solidFill>
+                <a:latin typeface="Times New Roman" pitchFamily="34" charset="0"/>
+                <a:ea typeface="Times New Roman" pitchFamily="34" charset="-122"/>
+                <a:cs typeface="Times New Roman" pitchFamily="34" charset="-120"/>
+              </a:rPr>
+              <a:t>Correction: Possible Answer</a:t>
+            </a:r>
+            <a:endParaRPr lang="en-US" sz="3600" dirty="0"/>
+          </a:p>
+        </p:txBody>
+      </p:sp>
+      <p:sp>
+        <p:nvSpPr>
+          <p:cNvPr id="5" name="Text 2"/>
+          <p:cNvSpPr/>
+          <p:nvPr/>
+        </p:nvSpPr>
+        <p:spPr>
+          <a:xfrm>
+            <a:off x="5349240" y="1783080"/>
+            <a:ext cx="6522415" cy="4663440"/>
+          </a:xfrm>
+          <a:prstGeom prst="rect">
+            <a:avLst/>
+          </a:prstGeom>
+          <a:noFill/>
+          <a:ln/>
+        </p:spPr>
+        <p:txBody>
+          <a:bodyPr wrap="square" lIns="0" tIns="0" rIns="0" bIns="0" rtlCol="0" anchor="t"/>
+          <a:lstStyle/>
+          <a:p>
+            <a:pPr algn="l" indent="0" marL="0">
+              <a:spcAft>
+                <a:spcPts val="800"/>
+              </a:spcAft>
+              <a:buNone/>
+            </a:pPr>
+            <a:r>
+              <a:rPr lang="en-US" sz="4000" dirty="0">
+                <a:solidFill>
+                  <a:srgbClr val="111111"/>
+                </a:solidFill>
+                <a:latin typeface="Times New Roman" pitchFamily="34" charset="0"/>
+                <a:ea typeface="Times New Roman" pitchFamily="34" charset="-122"/>
+                <a:cs typeface="Times New Roman" pitchFamily="34" charset="-120"/>
+              </a:rPr>
+              <a:t>Irrigation from the Benue or Logone, tree planting (Green Sahel), and zaï pits, stone lines and manure on eroded fields.</a:t>
+            </a:r>
+            <a:endParaRPr lang="en-US" sz="4000" dirty="0"/>
+          </a:p>
+        </p:txBody>
+      </p:sp>
+      <p:sp>
+        <p:nvSpPr>
+          <p:cNvPr id="25" name="Slide Number Placeholder 0"/>
+          <p:cNvSpPr>
+            <a:spLocks noGrp="1"/>
+          </p:cNvSpPr>
+          <p:nvPr>
+            <p:ph type="sldNum" sz="quarter" idx="4294967295"/>
+          </p:nvPr>
+        </p:nvSpPr>
+        <p:spPr>
+          <a:xfrm>
+            <a:off x="27432" y="91440"/>
+            <a:ext cx="585216" cy="475488"/>
+          </a:xfrm>
+          <a:prstGeom prst="rect">
+            <a:avLst/>
+          </a:prstGeom>
+          <a:extLst>
+            <a:ext uri="{C572A759-6A51-4108-AA02-DFA0A04FC94B}">
+              <ma14:wrappingTextBoxFlag xmlns:ma14="http://schemas.microsoft.com/office/mac/drawingml/2011/main" val="0"/>
+            </a:ext>
+          </a:extLst>
+        </p:spPr>
+        <p:txBody>
+          <a:bodyPr/>
+          <a:lstStyle>
+            <a:lvl1pPr>
+              <a:defRPr sz="2000">
+                <a:solidFill>
+                  <a:srgbClr val="FFFFFF"/>
+                </a:solidFill>
+                <a:latin typeface="Calibri"/>
+                <a:ea typeface="Calibri"/>
+                <a:cs typeface="Calibri"/>
+              </a:defRPr>
+            </a:lvl1pPr>
+          </a:lstStyle>
+          <a:p>
+            <a:pPr algn="ctr"/>
+            <a:fld id="{F7021451-1387-4CA6-816F-3879F97B5CBC}" type="slidenum">
+              <a:rPr b="1" lang="en-US"/>
+              <a:t>5</a:t>
+            </a:fld>
+            <a:endParaRPr lang="en-US"/>
+          </a:p>
+        </p:txBody>
+      </p:sp>
+    </p:spTree>
+  </p:cSld>
+  <p:clrMapOvr>
+    <a:masterClrMapping/>
+  </p:clrMapOvr>
+</p:sld>
+</file>
+
+<file path=ppt/slides/slide50.xml><?xml version="1.0" encoding="utf-8"?>
+<p:sld xmlns:a="http://schemas.openxmlformats.org/drawingml/2006/main" xmlns:r="http://schemas.openxmlformats.org/officeDocument/2006/relationships" xmlns:p="http://schemas.openxmlformats.org/presentationml/2006/main">
+  <p:cSld name="Slide 50">
+    <p:spTree>
+      <p:nvGrpSpPr>
+        <p:cNvPr id="1" name=""/>
+        <p:cNvGrpSpPr/>
+        <p:nvPr/>
+      </p:nvGrpSpPr>
+      <p:grpSpPr>
+        <a:xfrm>
+          <a:off x="0" y="0"/>
+          <a:ext cx="0" cy="0"/>
+          <a:chOff x="0" y="0"/>
+          <a:chExt cx="0" cy="0"/>
+        </a:xfrm>
+      </p:grpSpPr>
+      <p:sp>
+        <p:nvSpPr>
+          <p:cNvPr id="2" name="Text 0"/>
+          <p:cNvSpPr/>
+          <p:nvPr/>
+        </p:nvSpPr>
+        <p:spPr>
+          <a:xfrm>
+            <a:off x="457200" y="713232"/>
+            <a:ext cx="11368735" cy="274320"/>
+          </a:xfrm>
+          <a:prstGeom prst="rect">
+            <a:avLst/>
+          </a:prstGeom>
+          <a:noFill/>
+          <a:ln/>
+        </p:spPr>
+        <p:txBody>
+          <a:bodyPr wrap="square" lIns="0" tIns="0" rIns="0" bIns="0" rtlCol="0" anchor="ctr"/>
+          <a:lstStyle/>
+          <a:p>
+            <a:pPr algn="r" indent="0" marL="0">
+              <a:buNone/>
+            </a:pPr>
+            <a:r>
+              <a:rPr lang="en-US" sz="1400" b="1" dirty="0">
+                <a:solidFill>
+                  <a:srgbClr val="1C3F6E"/>
+                </a:solidFill>
+                <a:latin typeface="Calibri" pitchFamily="34" charset="0"/>
+                <a:ea typeface="Calibri" pitchFamily="34" charset="-122"/>
+                <a:cs typeface="Calibri" pitchFamily="34" charset="-120"/>
+              </a:rPr>
               <a:t>BILINGUAL GAME</a:t>
             </a:r>
             <a:endParaRPr lang="en-US" sz="1400" dirty="0"/>
@@ -16962,7 +17970,7 @@
       </p:sp>
       <p:graphicFrame>
         <p:nvGraphicFramePr>
-          <p:cNvPr id="49" name="Table 0"/>
+          <p:cNvPr id="51" name="Table 0"/>
           <p:cNvGraphicFramePr>
             <a:graphicFrameLocks noGrp="1"/>
           </p:cNvGraphicFramePr>
@@ -17998,7 +19006,7 @@
             <a:pPr algn="ctr"/>
             <a:fld id="{F7021451-1387-4CA6-816F-3879F97B5CBC}" type="slidenum">
               <a:rPr b="1" lang="en-US"/>
-              <a:t>48</a:t>
+              <a:t>50</a:t>
             </a:fld>
             <a:endParaRPr lang="en-US"/>
           </a:p>
@@ -18012,9 +19020,9 @@
 </p:sld>
 </file>
 
-<file path=ppt/slides/slide49.xml><?xml version="1.0" encoding="utf-8"?>
+<file path=ppt/slides/slide51.xml><?xml version="1.0" encoding="utf-8"?>
 <p:sld xmlns:a="http://schemas.openxmlformats.org/drawingml/2006/main" xmlns:r="http://schemas.openxmlformats.org/officeDocument/2006/relationships" xmlns:p="http://schemas.openxmlformats.org/presentationml/2006/main">
-  <p:cSld name="Slide 49">
+  <p:cSld name="Slide 51">
     <p:spTree>
       <p:nvGrpSpPr>
         <p:cNvPr id="1" name=""/>
@@ -18109,7 +19117,7 @@
       </p:sp>
       <p:graphicFrame>
         <p:nvGraphicFramePr>
-          <p:cNvPr id="50" name="Table 0"/>
+          <p:cNvPr id="52" name="Table 0"/>
           <p:cNvGraphicFramePr>
             <a:graphicFrameLocks noGrp="1"/>
           </p:cNvGraphicFramePr>
@@ -18731,7 +19739,7 @@
             <a:pPr algn="ctr"/>
             <a:fld id="{F7021451-1387-4CA6-816F-3879F97B5CBC}" type="slidenum">
               <a:rPr b="1" lang="en-US"/>
-              <a:t>49</a:t>
+              <a:t>51</a:t>
             </a:fld>
             <a:endParaRPr lang="en-US"/>
           </a:p>
@@ -18745,9 +19753,9 @@
 </p:sld>
 </file>
 
-<file path=ppt/slides/slide5.xml><?xml version="1.0" encoding="utf-8"?>
+<file path=ppt/slides/slide52.xml><?xml version="1.0" encoding="utf-8"?>
 <p:sld xmlns:a="http://schemas.openxmlformats.org/drawingml/2006/main" xmlns:r="http://schemas.openxmlformats.org/officeDocument/2006/relationships" xmlns:p="http://schemas.openxmlformats.org/presentationml/2006/main">
-  <p:cSld name="Slide 5">
+  <p:cSld name="Slide 52">
     <p:spTree>
       <p:nvGrpSpPr>
         <p:cNvPr id="1" name=""/>
@@ -18795,225 +19803,6 @@
                 <a:ea typeface="Calibri" pitchFamily="34" charset="-122"/>
                 <a:cs typeface="Calibri" pitchFamily="34" charset="-120"/>
               </a:rPr>
-              <a:t>HOMEWORK CORRECTION</a:t>
-            </a:r>
-            <a:endParaRPr lang="en-US" sz="1400" dirty="0"/>
-          </a:p>
-        </p:txBody>
-      </p:sp>
-      <p:pic>
-        <p:nvPicPr>
-          <p:cNvPr id="3" name="Image 0" descr="/home/claude/f4/img/minesec_sheet.png">    </p:cNvPr>
-          <p:cNvPicPr>
-            <a:picLocks noChangeAspect="1"/>
-          </p:cNvPicPr>
-          <p:nvPr/>
-        </p:nvPicPr>
-        <p:blipFill>
-          <a:blip r:embed="rId1"/>
-          <a:stretch>
-            <a:fillRect/>
-          </a:stretch>
-        </p:blipFill>
-        <p:spPr>
-          <a:xfrm>
-            <a:off x="0" y="658368"/>
-            <a:ext cx="5120640" cy="5833872"/>
-          </a:xfrm>
-          <a:prstGeom prst="rect">
-            <a:avLst/>
-          </a:prstGeom>
-        </p:spPr>
-      </p:pic>
-      <p:sp>
-        <p:nvSpPr>
-          <p:cNvPr id="4" name="Text 1"/>
-          <p:cNvSpPr/>
-          <p:nvPr/>
-        </p:nvSpPr>
-        <p:spPr>
-          <a:xfrm>
-            <a:off x="5349240" y="1005840"/>
-            <a:ext cx="6522415" cy="731520"/>
-          </a:xfrm>
-          <a:prstGeom prst="rect">
-            <a:avLst/>
-          </a:prstGeom>
-          <a:noFill/>
-          <a:ln/>
-        </p:spPr>
-        <p:txBody>
-          <a:bodyPr wrap="square" lIns="0" tIns="0" rIns="0" bIns="0" rtlCol="0" anchor="ctr">
-            <a:normAutofit/>
-          </a:bodyPr>
-          <a:lstStyle/>
-          <a:p>
-            <a:pPr algn="ctr" indent="0" marL="0">
-              <a:buNone/>
-            </a:pPr>
-            <a:r>
-              <a:rPr lang="en-US" sz="3600" b="1" dirty="0">
-                <a:solidFill>
-                  <a:srgbClr val="990011"/>
-                </a:solidFill>
-                <a:latin typeface="Times New Roman" pitchFamily="34" charset="0"/>
-                <a:ea typeface="Times New Roman" pitchFamily="34" charset="-122"/>
-                <a:cs typeface="Times New Roman" pitchFamily="34" charset="-120"/>
-              </a:rPr>
-              <a:t>Correction: Possible Answer</a:t>
-            </a:r>
-            <a:endParaRPr lang="en-US" sz="3600" dirty="0"/>
-          </a:p>
-        </p:txBody>
-      </p:sp>
-      <p:sp>
-        <p:nvSpPr>
-          <p:cNvPr id="5" name="Text 2"/>
-          <p:cNvSpPr/>
-          <p:nvPr/>
-        </p:nvSpPr>
-        <p:spPr>
-          <a:xfrm>
-            <a:off x="5349240" y="1783080"/>
-            <a:ext cx="6522415" cy="4663440"/>
-          </a:xfrm>
-          <a:prstGeom prst="rect">
-            <a:avLst/>
-          </a:prstGeom>
-          <a:noFill/>
-          <a:ln/>
-        </p:spPr>
-        <p:txBody>
-          <a:bodyPr wrap="square" lIns="0" tIns="0" rIns="0" bIns="0" rtlCol="0" anchor="t"/>
-          <a:lstStyle/>
-          <a:p>
-            <a:pPr algn="l" indent="0" marL="0">
-              <a:spcAft>
-                <a:spcPts val="800"/>
-              </a:spcAft>
-              <a:buNone/>
-            </a:pPr>
-            <a:r>
-              <a:rPr lang="en-US" sz="4000" dirty="0">
-                <a:solidFill>
-                  <a:srgbClr val="111111"/>
-                </a:solidFill>
-                <a:latin typeface="Times New Roman" pitchFamily="34" charset="0"/>
-                <a:ea typeface="Times New Roman" pitchFamily="34" charset="-122"/>
-                <a:cs typeface="Times New Roman" pitchFamily="34" charset="-120"/>
-              </a:rPr>
-              <a:t>Irrigation from the Benue or Logone, tree planting (Green Sahel), and zaï pits, stone lines and manure on eroded fields.</a:t>
-            </a:r>
-            <a:endParaRPr lang="en-US" sz="4000" dirty="0"/>
-          </a:p>
-        </p:txBody>
-      </p:sp>
-      <p:sp>
-        <p:nvSpPr>
-          <p:cNvPr id="25" name="Slide Number Placeholder 0"/>
-          <p:cNvSpPr>
-            <a:spLocks noGrp="1"/>
-          </p:cNvSpPr>
-          <p:nvPr>
-            <p:ph type="sldNum" sz="quarter" idx="4294967295"/>
-          </p:nvPr>
-        </p:nvSpPr>
-        <p:spPr>
-          <a:xfrm>
-            <a:off x="27432" y="91440"/>
-            <a:ext cx="585216" cy="475488"/>
-          </a:xfrm>
-          <a:prstGeom prst="rect">
-            <a:avLst/>
-          </a:prstGeom>
-          <a:extLst>
-            <a:ext uri="{C572A759-6A51-4108-AA02-DFA0A04FC94B}">
-              <ma14:wrappingTextBoxFlag xmlns:ma14="http://schemas.microsoft.com/office/mac/drawingml/2011/main" val="0"/>
-            </a:ext>
-          </a:extLst>
-        </p:spPr>
-        <p:txBody>
-          <a:bodyPr/>
-          <a:lstStyle>
-            <a:lvl1pPr>
-              <a:defRPr sz="2000">
-                <a:solidFill>
-                  <a:srgbClr val="FFFFFF"/>
-                </a:solidFill>
-                <a:latin typeface="Calibri"/>
-                <a:ea typeface="Calibri"/>
-                <a:cs typeface="Calibri"/>
-              </a:defRPr>
-            </a:lvl1pPr>
-          </a:lstStyle>
-          <a:p>
-            <a:pPr algn="ctr"/>
-            <a:fld id="{F7021451-1387-4CA6-816F-3879F97B5CBC}" type="slidenum">
-              <a:rPr b="1" lang="en-US"/>
-              <a:t>5</a:t>
-            </a:fld>
-            <a:endParaRPr lang="en-US"/>
-          </a:p>
-        </p:txBody>
-      </p:sp>
-    </p:spTree>
-  </p:cSld>
-  <p:clrMapOvr>
-    <a:masterClrMapping/>
-  </p:clrMapOvr>
-</p:sld>
-</file>
-
-<file path=ppt/slides/slide50.xml><?xml version="1.0" encoding="utf-8"?>
-<p:sld xmlns:a="http://schemas.openxmlformats.org/drawingml/2006/main" xmlns:r="http://schemas.openxmlformats.org/officeDocument/2006/relationships" xmlns:p="http://schemas.openxmlformats.org/presentationml/2006/main">
-  <p:cSld name="Slide 50">
-    <p:spTree>
-      <p:nvGrpSpPr>
-        <p:cNvPr id="1" name=""/>
-        <p:cNvGrpSpPr/>
-        <p:nvPr/>
-      </p:nvGrpSpPr>
-      <p:grpSpPr>
-        <a:xfrm>
-          <a:off x="0" y="0"/>
-          <a:ext cx="0" cy="0"/>
-          <a:chOff x="0" y="0"/>
-          <a:chExt cx="0" cy="0"/>
-        </a:xfrm>
-      </p:grpSpPr>
-      <p:sp>
-        <p:nvSpPr>
-          <p:cNvPr id="2" name="Text 0"/>
-          <p:cNvSpPr/>
-          <p:nvPr/>
-        </p:nvSpPr>
-        <p:spPr>
-          <a:xfrm>
-            <a:off x="457200" y="713232"/>
-            <a:ext cx="11368735" cy="274320"/>
-          </a:xfrm>
-          <a:prstGeom prst="rect">
-            <a:avLst/>
-          </a:prstGeom>
-          <a:noFill/>
-          <a:ln/>
-        </p:spPr>
-        <p:txBody>
-          <a:bodyPr wrap="square" lIns="0" tIns="0" rIns="0" bIns="0" rtlCol="0" anchor="ctr"/>
-          <a:lstStyle/>
-          <a:p>
-            <a:pPr algn="r" indent="0" marL="0">
-              <a:buNone/>
-            </a:pPr>
-            <a:r>
-              <a:rPr lang="en-US" sz="1400" b="1" dirty="0">
-                <a:solidFill>
-                  <a:srgbClr val="1C3F6E"/>
-                </a:solidFill>
-                <a:latin typeface="Calibri" pitchFamily="34" charset="0"/>
-                <a:ea typeface="Calibri" pitchFamily="34" charset="-122"/>
-                <a:cs typeface="Calibri" pitchFamily="34" charset="-120"/>
-              </a:rPr>
               <a:t>LOGBOOK</a:t>
             </a:r>
             <a:endParaRPr lang="en-US" sz="1400" dirty="0"/>
@@ -19061,7 +19850,7 @@
       </p:sp>
       <p:graphicFrame>
         <p:nvGraphicFramePr>
-          <p:cNvPr id="51" name="Table 0"/>
+          <p:cNvPr id="53" name="Table 0"/>
           <p:cNvGraphicFramePr>
             <a:graphicFrameLocks noGrp="1"/>
           </p:cNvGraphicFramePr>
@@ -19171,7 +19960,7 @@
                           <a:ea typeface="Calibri" pitchFamily="34" charset="-122"/>
                           <a:cs typeface="Calibri" pitchFamily="34" charset="-120"/>
                         </a:rPr>
-                        <a:t>DEFINITIONS; Reasons and Objectives; Case Study: The Three Gorges Dam in China.</a:t>
+                        <a:t>DEFINITIONS; Reasons and Objectives; Achievements; Problems and Solutions.</a:t>
                       </a:r>
                       <a:endParaRPr lang="en-US" sz="1600" dirty="0">
                         <a:latin typeface="Calibri" charset="0"/>
@@ -19821,7 +20610,7 @@
             <a:pPr algn="ctr"/>
             <a:fld id="{F7021451-1387-4CA6-816F-3879F97B5CBC}" type="slidenum">
               <a:rPr b="1" lang="en-US"/>
-              <a:t>50</a:t>
+              <a:t>52</a:t>
             </a:fld>
             <a:endParaRPr lang="en-US"/>
           </a:p>
@@ -19835,9 +20624,9 @@
 </p:sld>
 </file>
 
-<file path=ppt/slides/slide51.xml><?xml version="1.0" encoding="utf-8"?>
+<file path=ppt/slides/slide53.xml><?xml version="1.0" encoding="utf-8"?>
 <p:sld xmlns:a="http://schemas.openxmlformats.org/drawingml/2006/main" xmlns:r="http://schemas.openxmlformats.org/officeDocument/2006/relationships" xmlns:p="http://schemas.openxmlformats.org/presentationml/2006/main">
-  <p:cSld name="Slide 51">
+  <p:cSld name="Slide 53">
     <p:spTree>
       <p:nvGrpSpPr>
         <p:cNvPr id="1" name=""/>
@@ -20146,7 +20935,7 @@
             <a:pPr algn="ctr"/>
             <a:fld id="{F7021451-1387-4CA6-816F-3879F97B5CBC}" type="slidenum">
               <a:rPr b="1" lang="en-US"/>
-              <a:t>51</a:t>
+              <a:t>53</a:t>
             </a:fld>
             <a:endParaRPr lang="en-US"/>
           </a:p>
@@ -20160,9 +20949,9 @@
 </p:sld>
 </file>
 
-<file path=ppt/slides/slide52.xml><?xml version="1.0" encoding="utf-8"?>
+<file path=ppt/slides/slide54.xml><?xml version="1.0" encoding="utf-8"?>
 <p:sld xmlns:a="http://schemas.openxmlformats.org/drawingml/2006/main" xmlns:r="http://schemas.openxmlformats.org/officeDocument/2006/relationships" xmlns:p="http://schemas.openxmlformats.org/presentationml/2006/main">
-  <p:cSld name="Slide 52">
+  <p:cSld name="Slide 54">
     <p:spTree>
       <p:nvGrpSpPr>
         <p:cNvPr id="1" name=""/>
@@ -20471,7 +21260,7 @@
             <a:pPr algn="ctr"/>
             <a:fld id="{F7021451-1387-4CA6-816F-3879F97B5CBC}" type="slidenum">
               <a:rPr b="1" lang="en-US"/>
-              <a:t>52</a:t>
+              <a:t>54</a:t>
             </a:fld>
             <a:endParaRPr lang="en-US"/>
           </a:p>
